--- a/assets/memos/B10-memo.pptx
+++ b/assets/memos/B10-memo.pptx
@@ -3105,8 +3105,8 @@
         </p:nvSpPr>
         <p:spPr>
           <a:xfrm>
-            <a:off x="648000" y="1180800"/>
-            <a:ext cx="5058000" cy="511200"/>
+            <a:off x="532800" y="1180800"/>
+            <a:ext cx="6490800" cy="511200"/>
           </a:xfrm>
           <a:prstGeom prst="rect">
             <a:avLst/>
@@ -3128,7 +3128,7 @@
               </a:spcAft>
             </a:pPr>
             <a:r>
-              <a:rPr sz="2000" b="1" i="0">
+              <a:rPr sz="1800" b="1" i="0">
                 <a:solidFill>
                   <a:srgbClr val="4388BC"/>
                 </a:solidFill>
@@ -4562,8 +4562,8 @@
         </p:nvSpPr>
         <p:spPr>
           <a:xfrm>
-            <a:off x="648000" y="1180800"/>
-            <a:ext cx="5058000" cy="511200"/>
+            <a:off x="532800" y="1180800"/>
+            <a:ext cx="6490800" cy="511200"/>
           </a:xfrm>
           <a:prstGeom prst="rect">
             <a:avLst/>
@@ -4585,7 +4585,7 @@
               </a:spcAft>
             </a:pPr>
             <a:r>
-              <a:rPr sz="2000" b="1" i="0">
+              <a:rPr sz="1800" b="1" i="0">
                 <a:solidFill>
                   <a:srgbClr val="4388BC"/>
                 </a:solidFill>

--- a/assets/memos/B10-memo.pptx
+++ b/assets/memos/B10-memo.pptx
@@ -3440,7 +3440,7 @@
                 </a:solidFill>
                 <a:latin typeface="Arial"/>
               </a:rPr>
-              <a:t>→ Prenez rendez-vous à minuit, le dimanche ou pendant vos pauses. P…</a:t>
+              <a:t>→ Prenez rendez-vous à minuit, le dimanche ou pendant vos pauses. Plus besoin d'attendre l'ouverture du cabinet pour décrocher le téléphone.</a:t>
             </a:r>
           </a:p>
           <a:p>
@@ -3727,7 +3727,7 @@
                 </a:solidFill>
                 <a:latin typeface="Arial"/>
               </a:rPr>
-              <a:t>→ C'est souvent la première question que l'on se pose, et c'est tou…</a:t>
+              <a:t>→ C'est souvent la première question que l'on se pose, et c'est tout à fait légitime. La santé, c'est intime. Doctolib est soumis au Règlement Général sur la Protection des Données (RGPD) et héberge ses données sur des serveurs certifiés HDS (Hébergeur de Données de Santé), le plus haut niveau de certification en France pour la santé.</a:t>
             </a:r>
           </a:p>
           <a:p>
@@ -4033,7 +4033,7 @@
                 </a:solidFill>
                 <a:latin typeface="Arial"/>
               </a:rPr>
-              <a:t>→ Sur la page d'accueil de Doctolib, la barre de recherche vous dem…</a:t>
+              <a:t>→ Sur la page d'accueil de Doctolib, la barre de recherche vous demande deux informations simples : qui cherchez-vous (médecin généraliste, dermatologue, kinésithérapeute) et où (votre ville ou code postal). Les résultats s'affichent avec les premiers créneaux disponibles.</a:t>
             </a:r>
           </a:p>
           <a:p>
@@ -4071,7 +4071,7 @@
                 </a:solidFill>
                 <a:latin typeface="Arial"/>
               </a:rPr>
-              <a:t>→ Aujourd'hui, cette semaine, dans les 3 prochains jours — choisiss…</a:t>
+              <a:t>→ Aujourd'hui, cette semaine, dans les 3 prochains jours — choisissez selon votre urgence.</a:t>
             </a:r>
           </a:p>
         </p:txBody>
@@ -4358,7 +4358,7 @@
                 </a:solidFill>
                 <a:latin typeface="Arial"/>
               </a:rPr>
-              <a:t>→ Cliquez sur un horaire disponible affiché en bleu dans le calendr…</a:t>
+              <a:t>→ Cliquez sur un horaire disponible affiché en bleu dans le calendrier du praticien.</a:t>
             </a:r>
           </a:p>
           <a:p>
@@ -5203,7 +5203,7 @@
                 </a:solidFill>
                 <a:latin typeface="Arial"/>
               </a:rPr>
-              <a:t>→ La téléconsultation est remboursée par l'Assurance Maladie au mêm…</a:t>
+              <a:t>→ La téléconsultation est remboursée par l'Assurance Maladie au même titre qu'une consultation en cabinet, à condition que le médecin soit votre médecin traitant déclaré ou que vous passiez par lui (parcours de soins coordonnés).</a:t>
             </a:r>
           </a:p>
           <a:p>
@@ -5409,7 +5409,7 @@
                 </a:solidFill>
                 <a:latin typeface="Arial"/>
               </a:rPr>
-              <a:t>→ Vous avez maintenant toutes les clés pour utiliser Doctolib serei…</a:t>
+              <a:t>→ Vous avez maintenant toutes les clés pour utiliser Doctolib sereinement. Voici comment passer à l'action dès la fin de cet atelier :</a:t>
             </a:r>
           </a:p>
           <a:p>
@@ -5447,7 +5447,7 @@
                 </a:solidFill>
                 <a:latin typeface="Arial"/>
               </a:rPr>
-              <a:t>→ Rendez-vous sur doctolib.fr et créez votre compte en 3 minutes. R…</a:t>
+              <a:t>→ Rendez-vous sur doctolib.fr et créez votre compte en 3 minutes. Renseignez votre numéro de Sécurité sociale pour activer le remboursement.</a:t>
             </a:r>
           </a:p>
         </p:txBody>

--- a/assets/memos/B10-memo.pptx
+++ b/assets/memos/B10-memo.pptx
@@ -3167,7 +3167,7 @@
         <p:spPr>
           <a:xfrm>
             <a:off x="532800" y="1749600"/>
-            <a:ext cx="6490800" cy="1371600"/>
+            <a:ext cx="6490800" cy="1382400"/>
           </a:xfrm>
           <a:prstGeom prst="rect">
             <a:avLst/>
@@ -3208,7 +3208,7 @@
         <p:spPr>
           <a:xfrm>
             <a:off x="532800" y="1749600"/>
-            <a:ext cx="572400" cy="1371600"/>
+            <a:ext cx="572400" cy="1382400"/>
           </a:xfrm>
           <a:prstGeom prst="rect">
             <a:avLst/>
@@ -3374,7 +3374,7 @@
         <p:spPr>
           <a:xfrm>
             <a:off x="1159200" y="2214000"/>
-            <a:ext cx="5828400" cy="885600"/>
+            <a:ext cx="5828400" cy="881999"/>
           </a:xfrm>
           <a:prstGeom prst="rect">
             <a:avLst/>
@@ -3472,8 +3472,8 @@
         </p:nvSpPr>
         <p:spPr>
           <a:xfrm>
-            <a:off x="532800" y="3186000"/>
-            <a:ext cx="6490800" cy="1371600"/>
+            <a:off x="532800" y="3196799"/>
+            <a:ext cx="6490800" cy="1835999"/>
           </a:xfrm>
           <a:prstGeom prst="rect">
             <a:avLst/>
@@ -3513,8 +3513,8 @@
         </p:nvSpPr>
         <p:spPr>
           <a:xfrm>
-            <a:off x="532800" y="3186000"/>
-            <a:ext cx="572400" cy="1371600"/>
+            <a:off x="532800" y="3196799"/>
+            <a:ext cx="572400" cy="1835999"/>
           </a:xfrm>
           <a:prstGeom prst="rect">
             <a:avLst/>
@@ -3554,7 +3554,7 @@
         </p:nvSpPr>
         <p:spPr>
           <a:xfrm>
-            <a:off x="1206000" y="3607200"/>
+            <a:off x="1206000" y="3617999"/>
             <a:ext cx="5752800" cy="7200"/>
           </a:xfrm>
           <a:prstGeom prst="rect">
@@ -3595,7 +3595,7 @@
         </p:nvSpPr>
         <p:spPr>
           <a:xfrm>
-            <a:off x="532800" y="3252600"/>
+            <a:off x="532800" y="3263400"/>
             <a:ext cx="572400" cy="288000"/>
           </a:xfrm>
           <a:prstGeom prst="rect">
@@ -3637,7 +3637,7 @@
         </p:nvSpPr>
         <p:spPr>
           <a:xfrm>
-            <a:off x="1177200" y="3221999"/>
+            <a:off x="1177200" y="3232799"/>
             <a:ext cx="5810400" cy="370799"/>
           </a:xfrm>
           <a:prstGeom prst="rect">
@@ -3679,8 +3679,8 @@
         </p:nvSpPr>
         <p:spPr>
           <a:xfrm>
-            <a:off x="1159200" y="3650399"/>
-            <a:ext cx="5828400" cy="885600"/>
+            <a:off x="1159200" y="3661199"/>
+            <a:ext cx="5828400" cy="1335599"/>
           </a:xfrm>
           <a:prstGeom prst="rect">
             <a:avLst/>
@@ -3778,8 +3778,8 @@
         </p:nvSpPr>
         <p:spPr>
           <a:xfrm>
-            <a:off x="532800" y="4622400"/>
-            <a:ext cx="6490800" cy="1371600"/>
+            <a:off x="532800" y="5097599"/>
+            <a:ext cx="6490800" cy="1835999"/>
           </a:xfrm>
           <a:prstGeom prst="rect">
             <a:avLst/>
@@ -3819,8 +3819,8 @@
         </p:nvSpPr>
         <p:spPr>
           <a:xfrm>
-            <a:off x="532800" y="4622400"/>
-            <a:ext cx="572400" cy="1371600"/>
+            <a:off x="532800" y="5097599"/>
+            <a:ext cx="572400" cy="1835999"/>
           </a:xfrm>
           <a:prstGeom prst="rect">
             <a:avLst/>
@@ -3860,7 +3860,7 @@
         </p:nvSpPr>
         <p:spPr>
           <a:xfrm>
-            <a:off x="1206000" y="5043600"/>
+            <a:off x="1206000" y="5518799"/>
             <a:ext cx="5752800" cy="7200"/>
           </a:xfrm>
           <a:prstGeom prst="rect">
@@ -3901,7 +3901,7 @@
         </p:nvSpPr>
         <p:spPr>
           <a:xfrm>
-            <a:off x="532800" y="4689000"/>
+            <a:off x="532800" y="5164200"/>
             <a:ext cx="572400" cy="288000"/>
           </a:xfrm>
           <a:prstGeom prst="rect">
@@ -3943,7 +3943,7 @@
         </p:nvSpPr>
         <p:spPr>
           <a:xfrm>
-            <a:off x="1177200" y="4658400"/>
+            <a:off x="1177200" y="5133599"/>
             <a:ext cx="5810400" cy="370799"/>
           </a:xfrm>
           <a:prstGeom prst="rect">
@@ -3985,8 +3985,8 @@
         </p:nvSpPr>
         <p:spPr>
           <a:xfrm>
-            <a:off x="1159200" y="5086800"/>
-            <a:ext cx="5828400" cy="885600"/>
+            <a:off x="1159200" y="5561999"/>
+            <a:ext cx="5828400" cy="1335599"/>
           </a:xfrm>
           <a:prstGeom prst="rect">
             <a:avLst/>
@@ -4079,312 +4079,6 @@
       <p:sp>
         <p:nvSpPr>
           <p:cNvPr id="21" name="Rectangle 20"/>
-          <p:cNvSpPr/>
-          <p:nvPr/>
-        </p:nvSpPr>
-        <p:spPr>
-          <a:xfrm>
-            <a:off x="532800" y="6058799"/>
-            <a:ext cx="6490800" cy="1371600"/>
-          </a:xfrm>
-          <a:prstGeom prst="rect">
-            <a:avLst/>
-          </a:prstGeom>
-          <a:solidFill>
-            <a:srgbClr val="EBF7F6"/>
-          </a:solidFill>
-          <a:ln>
-            <a:noFill/>
-          </a:ln>
-        </p:spPr>
-        <p:style>
-          <a:lnRef idx="1">
-            <a:schemeClr val="accent1"/>
-          </a:lnRef>
-          <a:fillRef idx="3">
-            <a:schemeClr val="accent1"/>
-          </a:fillRef>
-          <a:effectRef idx="2">
-            <a:schemeClr val="accent1"/>
-          </a:effectRef>
-          <a:fontRef idx="minor">
-            <a:schemeClr val="lt1"/>
-          </a:fontRef>
-        </p:style>
-        <p:txBody>
-          <a:bodyPr rtlCol="0" anchor="ctr"/>
-          <a:lstStyle/>
-          <a:p/>
-        </p:txBody>
-      </p:sp>
-      <p:sp>
-        <p:nvSpPr>
-          <p:cNvPr id="22" name="Rectangle 21"/>
-          <p:cNvSpPr/>
-          <p:nvPr/>
-        </p:nvSpPr>
-        <p:spPr>
-          <a:xfrm>
-            <a:off x="532800" y="6058799"/>
-            <a:ext cx="572400" cy="1371600"/>
-          </a:xfrm>
-          <a:prstGeom prst="rect">
-            <a:avLst/>
-          </a:prstGeom>
-          <a:solidFill>
-            <a:srgbClr val="187C88"/>
-          </a:solidFill>
-          <a:ln>
-            <a:noFill/>
-          </a:ln>
-        </p:spPr>
-        <p:style>
-          <a:lnRef idx="1">
-            <a:schemeClr val="accent1"/>
-          </a:lnRef>
-          <a:fillRef idx="3">
-            <a:schemeClr val="accent1"/>
-          </a:fillRef>
-          <a:effectRef idx="2">
-            <a:schemeClr val="accent1"/>
-          </a:effectRef>
-          <a:fontRef idx="minor">
-            <a:schemeClr val="lt1"/>
-          </a:fontRef>
-        </p:style>
-        <p:txBody>
-          <a:bodyPr rtlCol="0" anchor="ctr"/>
-          <a:lstStyle/>
-          <a:p/>
-        </p:txBody>
-      </p:sp>
-      <p:sp>
-        <p:nvSpPr>
-          <p:cNvPr id="23" name="Rectangle 22"/>
-          <p:cNvSpPr/>
-          <p:nvPr/>
-        </p:nvSpPr>
-        <p:spPr>
-          <a:xfrm>
-            <a:off x="1206000" y="6480000"/>
-            <a:ext cx="5752800" cy="7200"/>
-          </a:xfrm>
-          <a:prstGeom prst="rect">
-            <a:avLst/>
-          </a:prstGeom>
-          <a:solidFill>
-            <a:srgbClr val="DDDDDD"/>
-          </a:solidFill>
-          <a:ln>
-            <a:noFill/>
-          </a:ln>
-        </p:spPr>
-        <p:style>
-          <a:lnRef idx="1">
-            <a:schemeClr val="accent1"/>
-          </a:lnRef>
-          <a:fillRef idx="3">
-            <a:schemeClr val="accent1"/>
-          </a:fillRef>
-          <a:effectRef idx="2">
-            <a:schemeClr val="accent1"/>
-          </a:effectRef>
-          <a:fontRef idx="minor">
-            <a:schemeClr val="lt1"/>
-          </a:fontRef>
-        </p:style>
-        <p:txBody>
-          <a:bodyPr rtlCol="0" anchor="ctr"/>
-          <a:lstStyle/>
-          <a:p/>
-        </p:txBody>
-      </p:sp>
-      <p:sp>
-        <p:nvSpPr>
-          <p:cNvPr id="24" name="TextBox 23"/>
-          <p:cNvSpPr txBox="1"/>
-          <p:nvPr/>
-        </p:nvSpPr>
-        <p:spPr>
-          <a:xfrm>
-            <a:off x="532800" y="6125399"/>
-            <a:ext cx="572400" cy="288000"/>
-          </a:xfrm>
-          <a:prstGeom prst="rect">
-            <a:avLst/>
-          </a:prstGeom>
-          <a:noFill/>
-        </p:spPr>
-        <p:txBody>
-          <a:bodyPr wrap="square" tIns="0" bIns="0" lIns="18000" rIns="18000">
-            <a:spAutoFit/>
-          </a:bodyPr>
-          <a:lstStyle/>
-          <a:p>
-            <a:pPr algn="ctr">
-              <a:spcBef>
-                <a:spcPts val="0"/>
-              </a:spcBef>
-              <a:spcAft>
-                <a:spcPts val="100"/>
-              </a:spcAft>
-            </a:pPr>
-            <a:r>
-              <a:rPr sz="2200" b="1" i="0">
-                <a:solidFill>
-                  <a:srgbClr val="FFFFFF"/>
-                </a:solidFill>
-                <a:latin typeface="Arial"/>
-              </a:rPr>
-              <a:t>4</a:t>
-            </a:r>
-          </a:p>
-        </p:txBody>
-      </p:sp>
-      <p:sp>
-        <p:nvSpPr>
-          <p:cNvPr id="25" name="TextBox 24"/>
-          <p:cNvSpPr txBox="1"/>
-          <p:nvPr/>
-        </p:nvSpPr>
-        <p:spPr>
-          <a:xfrm>
-            <a:off x="1177200" y="6094800"/>
-            <a:ext cx="5810400" cy="370799"/>
-          </a:xfrm>
-          <a:prstGeom prst="rect">
-            <a:avLst/>
-          </a:prstGeom>
-          <a:noFill/>
-        </p:spPr>
-        <p:txBody>
-          <a:bodyPr wrap="square" tIns="0" bIns="0" lIns="18000" rIns="18000">
-            <a:spAutoFit/>
-          </a:bodyPr>
-          <a:lstStyle/>
-          <a:p>
-            <a:pPr algn="l">
-              <a:spcBef>
-                <a:spcPts val="0"/>
-              </a:spcBef>
-              <a:spcAft>
-                <a:spcPts val="100"/>
-              </a:spcAft>
-            </a:pPr>
-            <a:r>
-              <a:rPr sz="1100" b="1" i="0">
-                <a:solidFill>
-                  <a:srgbClr val="187C88"/>
-                </a:solidFill>
-                <a:latin typeface="Arial"/>
-              </a:rPr>
-              <a:t>Prendre rendez-vous</a:t>
-            </a:r>
-          </a:p>
-        </p:txBody>
-      </p:sp>
-      <p:sp>
-        <p:nvSpPr>
-          <p:cNvPr id="26" name="TextBox 25"/>
-          <p:cNvSpPr txBox="1"/>
-          <p:nvPr/>
-        </p:nvSpPr>
-        <p:spPr>
-          <a:xfrm>
-            <a:off x="1159200" y="6523200"/>
-            <a:ext cx="5828400" cy="885600"/>
-          </a:xfrm>
-          <a:prstGeom prst="rect">
-            <a:avLst/>
-          </a:prstGeom>
-          <a:noFill/>
-        </p:spPr>
-        <p:txBody>
-          <a:bodyPr wrap="square" tIns="0" bIns="0" lIns="18000" rIns="18000">
-            <a:spAutoFit/>
-          </a:bodyPr>
-          <a:lstStyle/>
-          <a:p>
-            <a:pPr algn="l">
-              <a:spcBef>
-                <a:spcPts val="0"/>
-              </a:spcBef>
-              <a:spcAft>
-                <a:spcPts val="100"/>
-              </a:spcAft>
-            </a:pPr>
-            <a:r>
-              <a:rPr sz="1000" b="0" i="0">
-                <a:solidFill>
-                  <a:srgbClr val="2B2B2B"/>
-                </a:solidFill>
-                <a:latin typeface="Arial"/>
-              </a:rPr>
-              <a:t>→ De la recherche à la confirmation en 4 clics</a:t>
-            </a:r>
-          </a:p>
-          <a:p>
-            <a:pPr algn="l">
-              <a:spcBef>
-                <a:spcPts val="0"/>
-              </a:spcBef>
-              <a:spcAft>
-                <a:spcPts val="100"/>
-              </a:spcAft>
-            </a:pPr>
-            <a:r>
-              <a:rPr sz="1000" b="0" i="0">
-                <a:solidFill>
-                  <a:srgbClr val="2B2B2B"/>
-                </a:solidFill>
-                <a:latin typeface="Arial"/>
-              </a:rPr>
-              <a:t>→ Choisir le créneau</a:t>
-            </a:r>
-          </a:p>
-          <a:p>
-            <a:pPr algn="l">
-              <a:spcBef>
-                <a:spcPts val="0"/>
-              </a:spcBef>
-              <a:spcAft>
-                <a:spcPts val="100"/>
-              </a:spcAft>
-            </a:pPr>
-            <a:r>
-              <a:rPr sz="1000" b="0" i="0">
-                <a:solidFill>
-                  <a:srgbClr val="2B2B2B"/>
-                </a:solidFill>
-                <a:latin typeface="Arial"/>
-              </a:rPr>
-              <a:t>→ Cliquez sur un horaire disponible affiché en bleu dans le calendrier du praticien.</a:t>
-            </a:r>
-          </a:p>
-          <a:p>
-            <a:pPr algn="l">
-              <a:spcBef>
-                <a:spcPts val="0"/>
-              </a:spcBef>
-              <a:spcAft>
-                <a:spcPts val="100"/>
-              </a:spcAft>
-            </a:pPr>
-            <a:r>
-              <a:rPr sz="1000" b="0" i="0">
-                <a:solidFill>
-                  <a:srgbClr val="2B2B2B"/>
-                </a:solidFill>
-                <a:latin typeface="Arial"/>
-              </a:rPr>
-              <a:t>→ Indiquer le motif</a:t>
-            </a:r>
-          </a:p>
-        </p:txBody>
-      </p:sp>
-      <p:sp>
-        <p:nvSpPr>
-          <p:cNvPr id="27" name="Rectangle 26"/>
           <p:cNvSpPr/>
           <p:nvPr/>
         </p:nvSpPr>
@@ -4427,7 +4121,7 @@
       </p:sp>
       <p:sp>
         <p:nvSpPr>
-          <p:cNvPr id="28" name="TextBox 27"/>
+          <p:cNvPr id="22" name="TextBox 21"/>
           <p:cNvSpPr txBox="1"/>
           <p:nvPr/>
         </p:nvSpPr>
@@ -4462,7 +4156,7 @@
                 </a:solidFill>
                 <a:latin typeface="Arial"/>
               </a:rPr>
-              <a:t>→ Suite en page 2 : Comment ça se passe concrètement ? | Remboursement | Pour aller plus loin</a:t>
+              <a:t>→ Suite en page 2 : Prendre rendez-vous | Comment ça se passe concrètement ? | Remboursement</a:t>
             </a:r>
           </a:p>
           <a:p>
@@ -4488,7 +4182,7 @@
       </p:sp>
       <p:sp>
         <p:nvSpPr>
-          <p:cNvPr id="29" name="TextBox 28"/>
+          <p:cNvPr id="23" name="TextBox 22"/>
           <p:cNvSpPr txBox="1"/>
           <p:nvPr/>
         </p:nvSpPr>
@@ -4624,6 +4318,312 @@
         <p:spPr>
           <a:xfrm>
             <a:off x="532800" y="1749600"/>
+            <a:ext cx="6490800" cy="1382400"/>
+          </a:xfrm>
+          <a:prstGeom prst="rect">
+            <a:avLst/>
+          </a:prstGeom>
+          <a:solidFill>
+            <a:srgbClr val="EBF7F6"/>
+          </a:solidFill>
+          <a:ln>
+            <a:noFill/>
+          </a:ln>
+        </p:spPr>
+        <p:style>
+          <a:lnRef idx="1">
+            <a:schemeClr val="accent1"/>
+          </a:lnRef>
+          <a:fillRef idx="3">
+            <a:schemeClr val="accent1"/>
+          </a:fillRef>
+          <a:effectRef idx="2">
+            <a:schemeClr val="accent1"/>
+          </a:effectRef>
+          <a:fontRef idx="minor">
+            <a:schemeClr val="lt1"/>
+          </a:fontRef>
+        </p:style>
+        <p:txBody>
+          <a:bodyPr rtlCol="0" anchor="ctr"/>
+          <a:lstStyle/>
+          <a:p/>
+        </p:txBody>
+      </p:sp>
+      <p:sp>
+        <p:nvSpPr>
+          <p:cNvPr id="4" name="Rectangle 3"/>
+          <p:cNvSpPr/>
+          <p:nvPr/>
+        </p:nvSpPr>
+        <p:spPr>
+          <a:xfrm>
+            <a:off x="532800" y="1749600"/>
+            <a:ext cx="572400" cy="1382400"/>
+          </a:xfrm>
+          <a:prstGeom prst="rect">
+            <a:avLst/>
+          </a:prstGeom>
+          <a:solidFill>
+            <a:srgbClr val="187C88"/>
+          </a:solidFill>
+          <a:ln>
+            <a:noFill/>
+          </a:ln>
+        </p:spPr>
+        <p:style>
+          <a:lnRef idx="1">
+            <a:schemeClr val="accent1"/>
+          </a:lnRef>
+          <a:fillRef idx="3">
+            <a:schemeClr val="accent1"/>
+          </a:fillRef>
+          <a:effectRef idx="2">
+            <a:schemeClr val="accent1"/>
+          </a:effectRef>
+          <a:fontRef idx="minor">
+            <a:schemeClr val="lt1"/>
+          </a:fontRef>
+        </p:style>
+        <p:txBody>
+          <a:bodyPr rtlCol="0" anchor="ctr"/>
+          <a:lstStyle/>
+          <a:p/>
+        </p:txBody>
+      </p:sp>
+      <p:sp>
+        <p:nvSpPr>
+          <p:cNvPr id="5" name="Rectangle 4"/>
+          <p:cNvSpPr/>
+          <p:nvPr/>
+        </p:nvSpPr>
+        <p:spPr>
+          <a:xfrm>
+            <a:off x="1206000" y="2170800"/>
+            <a:ext cx="5752800" cy="7200"/>
+          </a:xfrm>
+          <a:prstGeom prst="rect">
+            <a:avLst/>
+          </a:prstGeom>
+          <a:solidFill>
+            <a:srgbClr val="DDDDDD"/>
+          </a:solidFill>
+          <a:ln>
+            <a:noFill/>
+          </a:ln>
+        </p:spPr>
+        <p:style>
+          <a:lnRef idx="1">
+            <a:schemeClr val="accent1"/>
+          </a:lnRef>
+          <a:fillRef idx="3">
+            <a:schemeClr val="accent1"/>
+          </a:fillRef>
+          <a:effectRef idx="2">
+            <a:schemeClr val="accent1"/>
+          </a:effectRef>
+          <a:fontRef idx="minor">
+            <a:schemeClr val="lt1"/>
+          </a:fontRef>
+        </p:style>
+        <p:txBody>
+          <a:bodyPr rtlCol="0" anchor="ctr"/>
+          <a:lstStyle/>
+          <a:p/>
+        </p:txBody>
+      </p:sp>
+      <p:sp>
+        <p:nvSpPr>
+          <p:cNvPr id="6" name="TextBox 5"/>
+          <p:cNvSpPr txBox="1"/>
+          <p:nvPr/>
+        </p:nvSpPr>
+        <p:spPr>
+          <a:xfrm>
+            <a:off x="532800" y="1816200"/>
+            <a:ext cx="572400" cy="288000"/>
+          </a:xfrm>
+          <a:prstGeom prst="rect">
+            <a:avLst/>
+          </a:prstGeom>
+          <a:noFill/>
+        </p:spPr>
+        <p:txBody>
+          <a:bodyPr wrap="square" tIns="0" bIns="0" lIns="18000" rIns="18000">
+            <a:spAutoFit/>
+          </a:bodyPr>
+          <a:lstStyle/>
+          <a:p>
+            <a:pPr algn="ctr">
+              <a:spcBef>
+                <a:spcPts val="0"/>
+              </a:spcBef>
+              <a:spcAft>
+                <a:spcPts val="100"/>
+              </a:spcAft>
+            </a:pPr>
+            <a:r>
+              <a:rPr sz="2200" b="1" i="0">
+                <a:solidFill>
+                  <a:srgbClr val="FFFFFF"/>
+                </a:solidFill>
+                <a:latin typeface="Arial"/>
+              </a:rPr>
+              <a:t>4</a:t>
+            </a:r>
+          </a:p>
+        </p:txBody>
+      </p:sp>
+      <p:sp>
+        <p:nvSpPr>
+          <p:cNvPr id="7" name="TextBox 6"/>
+          <p:cNvSpPr txBox="1"/>
+          <p:nvPr/>
+        </p:nvSpPr>
+        <p:spPr>
+          <a:xfrm>
+            <a:off x="1177200" y="1785600"/>
+            <a:ext cx="5810400" cy="370799"/>
+          </a:xfrm>
+          <a:prstGeom prst="rect">
+            <a:avLst/>
+          </a:prstGeom>
+          <a:noFill/>
+        </p:spPr>
+        <p:txBody>
+          <a:bodyPr wrap="square" tIns="0" bIns="0" lIns="18000" rIns="18000">
+            <a:spAutoFit/>
+          </a:bodyPr>
+          <a:lstStyle/>
+          <a:p>
+            <a:pPr algn="l">
+              <a:spcBef>
+                <a:spcPts val="0"/>
+              </a:spcBef>
+              <a:spcAft>
+                <a:spcPts val="100"/>
+              </a:spcAft>
+            </a:pPr>
+            <a:r>
+              <a:rPr sz="1100" b="1" i="0">
+                <a:solidFill>
+                  <a:srgbClr val="187C88"/>
+                </a:solidFill>
+                <a:latin typeface="Arial"/>
+              </a:rPr>
+              <a:t>Prendre rendez-vous</a:t>
+            </a:r>
+          </a:p>
+        </p:txBody>
+      </p:sp>
+      <p:sp>
+        <p:nvSpPr>
+          <p:cNvPr id="8" name="TextBox 7"/>
+          <p:cNvSpPr txBox="1"/>
+          <p:nvPr/>
+        </p:nvSpPr>
+        <p:spPr>
+          <a:xfrm>
+            <a:off x="1159200" y="2214000"/>
+            <a:ext cx="5828400" cy="881999"/>
+          </a:xfrm>
+          <a:prstGeom prst="rect">
+            <a:avLst/>
+          </a:prstGeom>
+          <a:noFill/>
+        </p:spPr>
+        <p:txBody>
+          <a:bodyPr wrap="square" tIns="0" bIns="0" lIns="18000" rIns="18000">
+            <a:spAutoFit/>
+          </a:bodyPr>
+          <a:lstStyle/>
+          <a:p>
+            <a:pPr algn="l">
+              <a:spcBef>
+                <a:spcPts val="0"/>
+              </a:spcBef>
+              <a:spcAft>
+                <a:spcPts val="100"/>
+              </a:spcAft>
+            </a:pPr>
+            <a:r>
+              <a:rPr sz="1000" b="0" i="0">
+                <a:solidFill>
+                  <a:srgbClr val="2B2B2B"/>
+                </a:solidFill>
+                <a:latin typeface="Arial"/>
+              </a:rPr>
+              <a:t>→ De la recherche à la confirmation en 4 clics</a:t>
+            </a:r>
+          </a:p>
+          <a:p>
+            <a:pPr algn="l">
+              <a:spcBef>
+                <a:spcPts val="0"/>
+              </a:spcBef>
+              <a:spcAft>
+                <a:spcPts val="100"/>
+              </a:spcAft>
+            </a:pPr>
+            <a:r>
+              <a:rPr sz="1000" b="0" i="0">
+                <a:solidFill>
+                  <a:srgbClr val="2B2B2B"/>
+                </a:solidFill>
+                <a:latin typeface="Arial"/>
+              </a:rPr>
+              <a:t>→ Choisir le créneau</a:t>
+            </a:r>
+          </a:p>
+          <a:p>
+            <a:pPr algn="l">
+              <a:spcBef>
+                <a:spcPts val="0"/>
+              </a:spcBef>
+              <a:spcAft>
+                <a:spcPts val="100"/>
+              </a:spcAft>
+            </a:pPr>
+            <a:r>
+              <a:rPr sz="1000" b="0" i="0">
+                <a:solidFill>
+                  <a:srgbClr val="2B2B2B"/>
+                </a:solidFill>
+                <a:latin typeface="Arial"/>
+              </a:rPr>
+              <a:t>→ Cliquez sur un horaire disponible affiché en bleu dans le calendrier du praticien.</a:t>
+            </a:r>
+          </a:p>
+          <a:p>
+            <a:pPr algn="l">
+              <a:spcBef>
+                <a:spcPts val="0"/>
+              </a:spcBef>
+              <a:spcAft>
+                <a:spcPts val="100"/>
+              </a:spcAft>
+            </a:pPr>
+            <a:r>
+              <a:rPr sz="1000" b="0" i="0">
+                <a:solidFill>
+                  <a:srgbClr val="2B2B2B"/>
+                </a:solidFill>
+                <a:latin typeface="Arial"/>
+              </a:rPr>
+              <a:t>→ Indiquer le motif</a:t>
+            </a:r>
+          </a:p>
+        </p:txBody>
+      </p:sp>
+      <p:sp>
+        <p:nvSpPr>
+          <p:cNvPr id="9" name="Rectangle 8"/>
+          <p:cNvSpPr/>
+          <p:nvPr/>
+        </p:nvSpPr>
+        <p:spPr>
+          <a:xfrm>
+            <a:off x="532800" y="3196799"/>
             <a:ext cx="6490800" cy="1371600"/>
           </a:xfrm>
           <a:prstGeom prst="rect">
@@ -4658,13 +4658,13 @@
       </p:sp>
       <p:sp>
         <p:nvSpPr>
-          <p:cNvPr id="4" name="Rectangle 3"/>
+          <p:cNvPr id="10" name="Rectangle 9"/>
           <p:cNvSpPr/>
           <p:nvPr/>
         </p:nvSpPr>
         <p:spPr>
           <a:xfrm>
-            <a:off x="532800" y="1749600"/>
+            <a:off x="532800" y="3196799"/>
             <a:ext cx="572400" cy="1371600"/>
           </a:xfrm>
           <a:prstGeom prst="rect">
@@ -4699,13 +4699,13 @@
       </p:sp>
       <p:sp>
         <p:nvSpPr>
-          <p:cNvPr id="5" name="Rectangle 4"/>
+          <p:cNvPr id="11" name="Rectangle 10"/>
           <p:cNvSpPr/>
           <p:nvPr/>
         </p:nvSpPr>
         <p:spPr>
           <a:xfrm>
-            <a:off x="1206000" y="2170800"/>
+            <a:off x="1206000" y="3617999"/>
             <a:ext cx="5752800" cy="7200"/>
           </a:xfrm>
           <a:prstGeom prst="rect">
@@ -4740,13 +4740,13 @@
       </p:sp>
       <p:sp>
         <p:nvSpPr>
-          <p:cNvPr id="6" name="TextBox 5"/>
+          <p:cNvPr id="12" name="TextBox 11"/>
           <p:cNvSpPr txBox="1"/>
           <p:nvPr/>
         </p:nvSpPr>
         <p:spPr>
           <a:xfrm>
-            <a:off x="532800" y="1816200"/>
+            <a:off x="532800" y="3263400"/>
             <a:ext cx="572400" cy="288000"/>
           </a:xfrm>
           <a:prstGeom prst="rect">
@@ -4782,13 +4782,13 @@
       </p:sp>
       <p:sp>
         <p:nvSpPr>
-          <p:cNvPr id="7" name="TextBox 6"/>
+          <p:cNvPr id="13" name="TextBox 12"/>
           <p:cNvSpPr txBox="1"/>
           <p:nvPr/>
         </p:nvSpPr>
         <p:spPr>
           <a:xfrm>
-            <a:off x="1177200" y="1785600"/>
+            <a:off x="1177200" y="3232799"/>
             <a:ext cx="5810400" cy="370799"/>
           </a:xfrm>
           <a:prstGeom prst="rect">
@@ -4824,14 +4824,14 @@
       </p:sp>
       <p:sp>
         <p:nvSpPr>
-          <p:cNvPr id="8" name="TextBox 7"/>
+          <p:cNvPr id="14" name="TextBox 13"/>
           <p:cNvSpPr txBox="1"/>
           <p:nvPr/>
         </p:nvSpPr>
         <p:spPr>
           <a:xfrm>
-            <a:off x="1159200" y="2214000"/>
-            <a:ext cx="5828400" cy="885600"/>
+            <a:off x="1159200" y="3661199"/>
+            <a:ext cx="5828400" cy="871200"/>
           </a:xfrm>
           <a:prstGeom prst="rect">
             <a:avLst/>
@@ -4923,14 +4923,14 @@
       </p:sp>
       <p:sp>
         <p:nvSpPr>
-          <p:cNvPr id="9" name="Rectangle 8"/>
+          <p:cNvPr id="15" name="Rectangle 14"/>
           <p:cNvSpPr/>
           <p:nvPr/>
         </p:nvSpPr>
         <p:spPr>
           <a:xfrm>
-            <a:off x="532800" y="3186000"/>
-            <a:ext cx="6490800" cy="1371600"/>
+            <a:off x="532800" y="4633200"/>
+            <a:ext cx="6490800" cy="1533600"/>
           </a:xfrm>
           <a:prstGeom prst="rect">
             <a:avLst/>
@@ -4964,14 +4964,14 @@
       </p:sp>
       <p:sp>
         <p:nvSpPr>
-          <p:cNvPr id="10" name="Rectangle 9"/>
+          <p:cNvPr id="16" name="Rectangle 15"/>
           <p:cNvSpPr/>
           <p:nvPr/>
         </p:nvSpPr>
         <p:spPr>
           <a:xfrm>
-            <a:off x="532800" y="3186000"/>
-            <a:ext cx="572400" cy="1371600"/>
+            <a:off x="532800" y="4633200"/>
+            <a:ext cx="572400" cy="1533600"/>
           </a:xfrm>
           <a:prstGeom prst="rect">
             <a:avLst/>
@@ -5005,13 +5005,13 @@
       </p:sp>
       <p:sp>
         <p:nvSpPr>
-          <p:cNvPr id="11" name="Rectangle 10"/>
+          <p:cNvPr id="17" name="Rectangle 16"/>
           <p:cNvSpPr/>
           <p:nvPr/>
         </p:nvSpPr>
         <p:spPr>
           <a:xfrm>
-            <a:off x="1206000" y="3607200"/>
+            <a:off x="1206000" y="5054400"/>
             <a:ext cx="5752800" cy="7200"/>
           </a:xfrm>
           <a:prstGeom prst="rect">
@@ -5046,13 +5046,13 @@
       </p:sp>
       <p:sp>
         <p:nvSpPr>
-          <p:cNvPr id="12" name="TextBox 11"/>
+          <p:cNvPr id="18" name="TextBox 17"/>
           <p:cNvSpPr txBox="1"/>
           <p:nvPr/>
         </p:nvSpPr>
         <p:spPr>
           <a:xfrm>
-            <a:off x="532800" y="3252600"/>
+            <a:off x="532800" y="4699800"/>
             <a:ext cx="572400" cy="288000"/>
           </a:xfrm>
           <a:prstGeom prst="rect">
@@ -5088,13 +5088,13 @@
       </p:sp>
       <p:sp>
         <p:nvSpPr>
-          <p:cNvPr id="13" name="TextBox 12"/>
+          <p:cNvPr id="19" name="TextBox 18"/>
           <p:cNvSpPr txBox="1"/>
           <p:nvPr/>
         </p:nvSpPr>
         <p:spPr>
           <a:xfrm>
-            <a:off x="1177200" y="3221999"/>
+            <a:off x="1177200" y="4669200"/>
             <a:ext cx="5810400" cy="370799"/>
           </a:xfrm>
           <a:prstGeom prst="rect">
@@ -5130,14 +5130,14 @@
       </p:sp>
       <p:sp>
         <p:nvSpPr>
-          <p:cNvPr id="14" name="TextBox 13"/>
+          <p:cNvPr id="20" name="TextBox 19"/>
           <p:cNvSpPr txBox="1"/>
           <p:nvPr/>
         </p:nvSpPr>
         <p:spPr>
           <a:xfrm>
-            <a:off x="1159200" y="3650399"/>
-            <a:ext cx="5828400" cy="885600"/>
+            <a:off x="1159200" y="5097599"/>
+            <a:ext cx="5828400" cy="1033199"/>
           </a:xfrm>
           <a:prstGeom prst="rect">
             <a:avLst/>
@@ -5229,13 +5229,13 @@
       </p:sp>
       <p:sp>
         <p:nvSpPr>
-          <p:cNvPr id="15" name="Rectangle 14"/>
+          <p:cNvPr id="21" name="Rectangle 20"/>
           <p:cNvSpPr/>
           <p:nvPr/>
         </p:nvSpPr>
         <p:spPr>
           <a:xfrm>
-            <a:off x="532800" y="4730400"/>
+            <a:off x="532800" y="6339600"/>
             <a:ext cx="6490800" cy="1263600"/>
           </a:xfrm>
           <a:prstGeom prst="rect">
@@ -5272,13 +5272,13 @@
       </p:sp>
       <p:sp>
         <p:nvSpPr>
-          <p:cNvPr id="16" name="Rectangle 15"/>
+          <p:cNvPr id="22" name="Rectangle 21"/>
           <p:cNvSpPr/>
           <p:nvPr/>
         </p:nvSpPr>
         <p:spPr>
           <a:xfrm>
-            <a:off x="698400" y="4986000"/>
+            <a:off x="698400" y="6595200"/>
             <a:ext cx="6159600" cy="7200"/>
           </a:xfrm>
           <a:prstGeom prst="rect">
@@ -5313,13 +5313,13 @@
       </p:sp>
       <p:sp>
         <p:nvSpPr>
-          <p:cNvPr id="17" name="TextBox 16"/>
+          <p:cNvPr id="23" name="TextBox 22"/>
           <p:cNvSpPr txBox="1"/>
           <p:nvPr/>
         </p:nvSpPr>
         <p:spPr>
           <a:xfrm>
-            <a:off x="676800" y="4759200"/>
+            <a:off x="676800" y="6368399"/>
             <a:ext cx="6292800" cy="234000"/>
           </a:xfrm>
           <a:prstGeom prst="rect">
@@ -5355,13 +5355,13 @@
       </p:sp>
       <p:sp>
         <p:nvSpPr>
-          <p:cNvPr id="18" name="TextBox 17"/>
+          <p:cNvPr id="24" name="TextBox 23"/>
           <p:cNvSpPr txBox="1"/>
           <p:nvPr/>
         </p:nvSpPr>
         <p:spPr>
           <a:xfrm>
-            <a:off x="676800" y="5011200"/>
+            <a:off x="676800" y="6620400"/>
             <a:ext cx="6292800" cy="946800"/>
           </a:xfrm>
           <a:prstGeom prst="rect">
@@ -5454,7 +5454,7 @@
       </p:sp>
       <p:sp>
         <p:nvSpPr>
-          <p:cNvPr id="19" name="Rectangle 18"/>
+          <p:cNvPr id="25" name="Rectangle 24"/>
           <p:cNvSpPr/>
           <p:nvPr/>
         </p:nvSpPr>
@@ -5497,7 +5497,7 @@
       </p:sp>
       <p:sp>
         <p:nvSpPr>
-          <p:cNvPr id="20" name="Rectangle 19"/>
+          <p:cNvPr id="26" name="Rectangle 25"/>
           <p:cNvSpPr/>
           <p:nvPr/>
         </p:nvSpPr>
@@ -5538,7 +5538,7 @@
       </p:sp>
       <p:sp>
         <p:nvSpPr>
-          <p:cNvPr id="21" name="TextBox 20"/>
+          <p:cNvPr id="27" name="TextBox 26"/>
           <p:cNvSpPr txBox="1"/>
           <p:nvPr/>
         </p:nvSpPr>
@@ -5656,7 +5656,7 @@
       </p:sp>
       <p:sp>
         <p:nvSpPr>
-          <p:cNvPr id="22" name="TextBox 21"/>
+          <p:cNvPr id="28" name="TextBox 27"/>
           <p:cNvSpPr txBox="1"/>
           <p:nvPr/>
         </p:nvSpPr>

--- a/assets/memos/B10-memo.pptx
+++ b/assets/memos/B10-memo.pptx
@@ -3097,9 +3097,35 @@
         <p:nvPr/>
       </p:nvGrpSpPr>
       <p:grpSpPr/>
-      <p:sp>
-        <p:nvSpPr>
-          <p:cNvPr id="2" name="TextBox 1"/>
+      <p:pic>
+        <p:nvPicPr>
+          <p:cNvPr id="2" name="Picture 1" descr="bg-p1.png"/>
+          <p:cNvPicPr>
+            <a:picLocks noChangeAspect="1"/>
+          </p:cNvPicPr>
+          <p:nvPr/>
+        </p:nvPicPr>
+        <p:blipFill>
+          <a:blip r:embed="rId2">
+            <a:alphaModFix amt="80000"/>
+          </a:blip>
+          <a:stretch>
+            <a:fillRect/>
+          </a:stretch>
+        </p:blipFill>
+        <p:spPr>
+          <a:xfrm>
+            <a:off x="0" y="0"/>
+            <a:ext cx="7556399" cy="10692000"/>
+          </a:xfrm>
+          <a:prstGeom prst="rect">
+            <a:avLst/>
+          </a:prstGeom>
+        </p:spPr>
+      </p:pic>
+      <p:sp>
+        <p:nvSpPr>
+          <p:cNvPr id="3" name="TextBox 2"/>
           <p:cNvSpPr txBox="1"/>
           <p:nvPr/>
         </p:nvSpPr>
@@ -3160,7 +3186,7 @@
       </p:sp>
       <p:sp>
         <p:nvSpPr>
-          <p:cNvPr id="3" name="Rectangle 2"/>
+          <p:cNvPr id="4" name="Rectangle 3"/>
           <p:cNvSpPr/>
           <p:nvPr/>
         </p:nvSpPr>
@@ -3201,7 +3227,7 @@
       </p:sp>
       <p:sp>
         <p:nvSpPr>
-          <p:cNvPr id="4" name="Rectangle 3"/>
+          <p:cNvPr id="5" name="Rectangle 4"/>
           <p:cNvSpPr/>
           <p:nvPr/>
         </p:nvSpPr>
@@ -3242,7 +3268,7 @@
       </p:sp>
       <p:sp>
         <p:nvSpPr>
-          <p:cNvPr id="5" name="Rectangle 4"/>
+          <p:cNvPr id="6" name="Rectangle 5"/>
           <p:cNvSpPr/>
           <p:nvPr/>
         </p:nvSpPr>
@@ -3283,7 +3309,7 @@
       </p:sp>
       <p:sp>
         <p:nvSpPr>
-          <p:cNvPr id="6" name="TextBox 5"/>
+          <p:cNvPr id="7" name="TextBox 6"/>
           <p:cNvSpPr txBox="1"/>
           <p:nvPr/>
         </p:nvSpPr>
@@ -3325,7 +3351,7 @@
       </p:sp>
       <p:sp>
         <p:nvSpPr>
-          <p:cNvPr id="7" name="TextBox 6"/>
+          <p:cNvPr id="8" name="TextBox 7"/>
           <p:cNvSpPr txBox="1"/>
           <p:nvPr/>
         </p:nvSpPr>
@@ -3367,7 +3393,7 @@
       </p:sp>
       <p:sp>
         <p:nvSpPr>
-          <p:cNvPr id="8" name="TextBox 7"/>
+          <p:cNvPr id="9" name="TextBox 8"/>
           <p:cNvSpPr txBox="1"/>
           <p:nvPr/>
         </p:nvSpPr>
@@ -3466,7 +3492,7 @@
       </p:sp>
       <p:sp>
         <p:nvSpPr>
-          <p:cNvPr id="9" name="Rectangle 8"/>
+          <p:cNvPr id="10" name="Rectangle 9"/>
           <p:cNvSpPr/>
           <p:nvPr/>
         </p:nvSpPr>
@@ -3507,7 +3533,7 @@
       </p:sp>
       <p:sp>
         <p:nvSpPr>
-          <p:cNvPr id="10" name="Rectangle 9"/>
+          <p:cNvPr id="11" name="Rectangle 10"/>
           <p:cNvSpPr/>
           <p:nvPr/>
         </p:nvSpPr>
@@ -3548,7 +3574,7 @@
       </p:sp>
       <p:sp>
         <p:nvSpPr>
-          <p:cNvPr id="11" name="Rectangle 10"/>
+          <p:cNvPr id="12" name="Rectangle 11"/>
           <p:cNvSpPr/>
           <p:nvPr/>
         </p:nvSpPr>
@@ -3589,7 +3615,7 @@
       </p:sp>
       <p:sp>
         <p:nvSpPr>
-          <p:cNvPr id="12" name="TextBox 11"/>
+          <p:cNvPr id="13" name="TextBox 12"/>
           <p:cNvSpPr txBox="1"/>
           <p:nvPr/>
         </p:nvSpPr>
@@ -3631,7 +3657,7 @@
       </p:sp>
       <p:sp>
         <p:nvSpPr>
-          <p:cNvPr id="13" name="TextBox 12"/>
+          <p:cNvPr id="14" name="TextBox 13"/>
           <p:cNvSpPr txBox="1"/>
           <p:nvPr/>
         </p:nvSpPr>
@@ -3673,7 +3699,7 @@
       </p:sp>
       <p:sp>
         <p:nvSpPr>
-          <p:cNvPr id="14" name="TextBox 13"/>
+          <p:cNvPr id="15" name="TextBox 14"/>
           <p:cNvSpPr txBox="1"/>
           <p:nvPr/>
         </p:nvSpPr>
@@ -3772,7 +3798,7 @@
       </p:sp>
       <p:sp>
         <p:nvSpPr>
-          <p:cNvPr id="15" name="Rectangle 14"/>
+          <p:cNvPr id="16" name="Rectangle 15"/>
           <p:cNvSpPr/>
           <p:nvPr/>
         </p:nvSpPr>
@@ -3813,7 +3839,7 @@
       </p:sp>
       <p:sp>
         <p:nvSpPr>
-          <p:cNvPr id="16" name="Rectangle 15"/>
+          <p:cNvPr id="17" name="Rectangle 16"/>
           <p:cNvSpPr/>
           <p:nvPr/>
         </p:nvSpPr>
@@ -3854,7 +3880,7 @@
       </p:sp>
       <p:sp>
         <p:nvSpPr>
-          <p:cNvPr id="17" name="Rectangle 16"/>
+          <p:cNvPr id="18" name="Rectangle 17"/>
           <p:cNvSpPr/>
           <p:nvPr/>
         </p:nvSpPr>
@@ -3895,7 +3921,7 @@
       </p:sp>
       <p:sp>
         <p:nvSpPr>
-          <p:cNvPr id="18" name="TextBox 17"/>
+          <p:cNvPr id="19" name="TextBox 18"/>
           <p:cNvSpPr txBox="1"/>
           <p:nvPr/>
         </p:nvSpPr>
@@ -3937,7 +3963,7 @@
       </p:sp>
       <p:sp>
         <p:nvSpPr>
-          <p:cNvPr id="19" name="TextBox 18"/>
+          <p:cNvPr id="20" name="TextBox 19"/>
           <p:cNvSpPr txBox="1"/>
           <p:nvPr/>
         </p:nvSpPr>
@@ -3979,7 +4005,7 @@
       </p:sp>
       <p:sp>
         <p:nvSpPr>
-          <p:cNvPr id="20" name="TextBox 19"/>
+          <p:cNvPr id="21" name="TextBox 20"/>
           <p:cNvSpPr txBox="1"/>
           <p:nvPr/>
         </p:nvSpPr>
@@ -4078,7 +4104,7 @@
       </p:sp>
       <p:sp>
         <p:nvSpPr>
-          <p:cNvPr id="21" name="Rectangle 20"/>
+          <p:cNvPr id="22" name="Rectangle 21"/>
           <p:cNvSpPr/>
           <p:nvPr/>
         </p:nvSpPr>
@@ -4121,7 +4147,7 @@
       </p:sp>
       <p:sp>
         <p:nvSpPr>
-          <p:cNvPr id="22" name="TextBox 21"/>
+          <p:cNvPr id="23" name="TextBox 22"/>
           <p:cNvSpPr txBox="1"/>
           <p:nvPr/>
         </p:nvSpPr>
@@ -4182,7 +4208,7 @@
       </p:sp>
       <p:sp>
         <p:nvSpPr>
-          <p:cNvPr id="23" name="TextBox 22"/>
+          <p:cNvPr id="24" name="TextBox 23"/>
           <p:cNvSpPr txBox="1"/>
           <p:nvPr/>
         </p:nvSpPr>
@@ -4248,9 +4274,35 @@
         <p:nvPr/>
       </p:nvGrpSpPr>
       <p:grpSpPr/>
-      <p:sp>
-        <p:nvSpPr>
-          <p:cNvPr id="2" name="TextBox 1"/>
+      <p:pic>
+        <p:nvPicPr>
+          <p:cNvPr id="2" name="Picture 1" descr="bg-p2.png"/>
+          <p:cNvPicPr>
+            <a:picLocks noChangeAspect="1"/>
+          </p:cNvPicPr>
+          <p:nvPr/>
+        </p:nvPicPr>
+        <p:blipFill>
+          <a:blip r:embed="rId2">
+            <a:alphaModFix amt="80000"/>
+          </a:blip>
+          <a:stretch>
+            <a:fillRect/>
+          </a:stretch>
+        </p:blipFill>
+        <p:spPr>
+          <a:xfrm>
+            <a:off x="0" y="0"/>
+            <a:ext cx="7556399" cy="10692000"/>
+          </a:xfrm>
+          <a:prstGeom prst="rect">
+            <a:avLst/>
+          </a:prstGeom>
+        </p:spPr>
+      </p:pic>
+      <p:sp>
+        <p:nvSpPr>
+          <p:cNvPr id="3" name="TextBox 2"/>
           <p:cNvSpPr txBox="1"/>
           <p:nvPr/>
         </p:nvSpPr>
@@ -4311,7 +4363,7 @@
       </p:sp>
       <p:sp>
         <p:nvSpPr>
-          <p:cNvPr id="3" name="Rectangle 2"/>
+          <p:cNvPr id="4" name="Rectangle 3"/>
           <p:cNvSpPr/>
           <p:nvPr/>
         </p:nvSpPr>
@@ -4352,7 +4404,7 @@
       </p:sp>
       <p:sp>
         <p:nvSpPr>
-          <p:cNvPr id="4" name="Rectangle 3"/>
+          <p:cNvPr id="5" name="Rectangle 4"/>
           <p:cNvSpPr/>
           <p:nvPr/>
         </p:nvSpPr>
@@ -4393,7 +4445,7 @@
       </p:sp>
       <p:sp>
         <p:nvSpPr>
-          <p:cNvPr id="5" name="Rectangle 4"/>
+          <p:cNvPr id="6" name="Rectangle 5"/>
           <p:cNvSpPr/>
           <p:nvPr/>
         </p:nvSpPr>
@@ -4434,7 +4486,7 @@
       </p:sp>
       <p:sp>
         <p:nvSpPr>
-          <p:cNvPr id="6" name="TextBox 5"/>
+          <p:cNvPr id="7" name="TextBox 6"/>
           <p:cNvSpPr txBox="1"/>
           <p:nvPr/>
         </p:nvSpPr>
@@ -4476,7 +4528,7 @@
       </p:sp>
       <p:sp>
         <p:nvSpPr>
-          <p:cNvPr id="7" name="TextBox 6"/>
+          <p:cNvPr id="8" name="TextBox 7"/>
           <p:cNvSpPr txBox="1"/>
           <p:nvPr/>
         </p:nvSpPr>
@@ -4518,7 +4570,7 @@
       </p:sp>
       <p:sp>
         <p:nvSpPr>
-          <p:cNvPr id="8" name="TextBox 7"/>
+          <p:cNvPr id="9" name="TextBox 8"/>
           <p:cNvSpPr txBox="1"/>
           <p:nvPr/>
         </p:nvSpPr>
@@ -4617,7 +4669,7 @@
       </p:sp>
       <p:sp>
         <p:nvSpPr>
-          <p:cNvPr id="9" name="Rectangle 8"/>
+          <p:cNvPr id="10" name="Rectangle 9"/>
           <p:cNvSpPr/>
           <p:nvPr/>
         </p:nvSpPr>
@@ -4658,7 +4710,7 @@
       </p:sp>
       <p:sp>
         <p:nvSpPr>
-          <p:cNvPr id="10" name="Rectangle 9"/>
+          <p:cNvPr id="11" name="Rectangle 10"/>
           <p:cNvSpPr/>
           <p:nvPr/>
         </p:nvSpPr>
@@ -4699,7 +4751,7 @@
       </p:sp>
       <p:sp>
         <p:nvSpPr>
-          <p:cNvPr id="11" name="Rectangle 10"/>
+          <p:cNvPr id="12" name="Rectangle 11"/>
           <p:cNvSpPr/>
           <p:nvPr/>
         </p:nvSpPr>
@@ -4740,7 +4792,7 @@
       </p:sp>
       <p:sp>
         <p:nvSpPr>
-          <p:cNvPr id="12" name="TextBox 11"/>
+          <p:cNvPr id="13" name="TextBox 12"/>
           <p:cNvSpPr txBox="1"/>
           <p:nvPr/>
         </p:nvSpPr>
@@ -4782,7 +4834,7 @@
       </p:sp>
       <p:sp>
         <p:nvSpPr>
-          <p:cNvPr id="13" name="TextBox 12"/>
+          <p:cNvPr id="14" name="TextBox 13"/>
           <p:cNvSpPr txBox="1"/>
           <p:nvPr/>
         </p:nvSpPr>
@@ -4824,7 +4876,7 @@
       </p:sp>
       <p:sp>
         <p:nvSpPr>
-          <p:cNvPr id="14" name="TextBox 13"/>
+          <p:cNvPr id="15" name="TextBox 14"/>
           <p:cNvSpPr txBox="1"/>
           <p:nvPr/>
         </p:nvSpPr>
@@ -4923,7 +4975,7 @@
       </p:sp>
       <p:sp>
         <p:nvSpPr>
-          <p:cNvPr id="15" name="Rectangle 14"/>
+          <p:cNvPr id="16" name="Rectangle 15"/>
           <p:cNvSpPr/>
           <p:nvPr/>
         </p:nvSpPr>
@@ -4964,7 +5016,7 @@
       </p:sp>
       <p:sp>
         <p:nvSpPr>
-          <p:cNvPr id="16" name="Rectangle 15"/>
+          <p:cNvPr id="17" name="Rectangle 16"/>
           <p:cNvSpPr/>
           <p:nvPr/>
         </p:nvSpPr>
@@ -5005,7 +5057,7 @@
       </p:sp>
       <p:sp>
         <p:nvSpPr>
-          <p:cNvPr id="17" name="Rectangle 16"/>
+          <p:cNvPr id="18" name="Rectangle 17"/>
           <p:cNvSpPr/>
           <p:nvPr/>
         </p:nvSpPr>
@@ -5046,7 +5098,7 @@
       </p:sp>
       <p:sp>
         <p:nvSpPr>
-          <p:cNvPr id="18" name="TextBox 17"/>
+          <p:cNvPr id="19" name="TextBox 18"/>
           <p:cNvSpPr txBox="1"/>
           <p:nvPr/>
         </p:nvSpPr>
@@ -5088,7 +5140,7 @@
       </p:sp>
       <p:sp>
         <p:nvSpPr>
-          <p:cNvPr id="19" name="TextBox 18"/>
+          <p:cNvPr id="20" name="TextBox 19"/>
           <p:cNvSpPr txBox="1"/>
           <p:nvPr/>
         </p:nvSpPr>
@@ -5130,7 +5182,7 @@
       </p:sp>
       <p:sp>
         <p:nvSpPr>
-          <p:cNvPr id="20" name="TextBox 19"/>
+          <p:cNvPr id="21" name="TextBox 20"/>
           <p:cNvSpPr txBox="1"/>
           <p:nvPr/>
         </p:nvSpPr>
@@ -5229,7 +5281,7 @@
       </p:sp>
       <p:sp>
         <p:nvSpPr>
-          <p:cNvPr id="21" name="Rectangle 20"/>
+          <p:cNvPr id="22" name="Rectangle 21"/>
           <p:cNvSpPr/>
           <p:nvPr/>
         </p:nvSpPr>
@@ -5272,7 +5324,7 @@
       </p:sp>
       <p:sp>
         <p:nvSpPr>
-          <p:cNvPr id="22" name="Rectangle 21"/>
+          <p:cNvPr id="23" name="Rectangle 22"/>
           <p:cNvSpPr/>
           <p:nvPr/>
         </p:nvSpPr>
@@ -5313,7 +5365,7 @@
       </p:sp>
       <p:sp>
         <p:nvSpPr>
-          <p:cNvPr id="23" name="TextBox 22"/>
+          <p:cNvPr id="24" name="TextBox 23"/>
           <p:cNvSpPr txBox="1"/>
           <p:nvPr/>
         </p:nvSpPr>
@@ -5355,7 +5407,7 @@
       </p:sp>
       <p:sp>
         <p:nvSpPr>
-          <p:cNvPr id="24" name="TextBox 23"/>
+          <p:cNvPr id="25" name="TextBox 24"/>
           <p:cNvSpPr txBox="1"/>
           <p:nvPr/>
         </p:nvSpPr>
@@ -5454,7 +5506,7 @@
       </p:sp>
       <p:sp>
         <p:nvSpPr>
-          <p:cNvPr id="25" name="Rectangle 24"/>
+          <p:cNvPr id="26" name="Rectangle 25"/>
           <p:cNvSpPr/>
           <p:nvPr/>
         </p:nvSpPr>
@@ -5497,7 +5549,7 @@
       </p:sp>
       <p:sp>
         <p:nvSpPr>
-          <p:cNvPr id="26" name="Rectangle 25"/>
+          <p:cNvPr id="27" name="Rectangle 26"/>
           <p:cNvSpPr/>
           <p:nvPr/>
         </p:nvSpPr>
@@ -5538,7 +5590,7 @@
       </p:sp>
       <p:sp>
         <p:nvSpPr>
-          <p:cNvPr id="27" name="TextBox 26"/>
+          <p:cNvPr id="28" name="TextBox 27"/>
           <p:cNvSpPr txBox="1"/>
           <p:nvPr/>
         </p:nvSpPr>
@@ -5656,7 +5708,7 @@
       </p:sp>
       <p:sp>
         <p:nvSpPr>
-          <p:cNvPr id="28" name="TextBox 27"/>
+          <p:cNvPr id="29" name="TextBox 28"/>
           <p:cNvSpPr txBox="1"/>
           <p:nvPr/>
         </p:nvSpPr>

--- a/assets/memos/B10-memo.pptx
+++ b/assets/memos/B10-memo.pptx
@@ -3084,9 +3084,12 @@
   <p:cSld>
     <p:bg>
       <p:bgPr>
-        <a:solidFill>
-          <a:srgbClr val="FFFFFF"/>
-        </a:solidFill>
+        <a:blipFill>
+          <a:blip r:embed="rId2"/>
+          <a:stretch>
+            <a:fillRect/>
+          </a:stretch>
+        </a:blipFill>
         <a:effectLst/>
       </p:bgPr>
     </p:bg>
@@ -3097,35 +3100,9 @@
         <p:nvPr/>
       </p:nvGrpSpPr>
       <p:grpSpPr/>
-      <p:pic>
-        <p:nvPicPr>
-          <p:cNvPr id="2" name="Picture 1" descr="bg-p1.png"/>
-          <p:cNvPicPr>
-            <a:picLocks noChangeAspect="1"/>
-          </p:cNvPicPr>
-          <p:nvPr/>
-        </p:nvPicPr>
-        <p:blipFill>
-          <a:blip r:embed="rId2">
-            <a:alphaModFix amt="80000"/>
-          </a:blip>
-          <a:stretch>
-            <a:fillRect/>
-          </a:stretch>
-        </p:blipFill>
-        <p:spPr>
-          <a:xfrm>
-            <a:off x="0" y="0"/>
-            <a:ext cx="7556399" cy="10692000"/>
-          </a:xfrm>
-          <a:prstGeom prst="rect">
-            <a:avLst/>
-          </a:prstGeom>
-        </p:spPr>
-      </p:pic>
-      <p:sp>
-        <p:nvSpPr>
-          <p:cNvPr id="3" name="TextBox 2"/>
+      <p:sp>
+        <p:nvSpPr>
+          <p:cNvPr id="2" name="TextBox 1"/>
           <p:cNvSpPr txBox="1"/>
           <p:nvPr/>
         </p:nvSpPr>
@@ -3186,7 +3163,7 @@
       </p:sp>
       <p:sp>
         <p:nvSpPr>
-          <p:cNvPr id="4" name="Rectangle 3"/>
+          <p:cNvPr id="3" name="Rectangle 2"/>
           <p:cNvSpPr/>
           <p:nvPr/>
         </p:nvSpPr>
@@ -3227,7 +3204,7 @@
       </p:sp>
       <p:sp>
         <p:nvSpPr>
-          <p:cNvPr id="5" name="Rectangle 4"/>
+          <p:cNvPr id="4" name="Rectangle 3"/>
           <p:cNvSpPr/>
           <p:nvPr/>
         </p:nvSpPr>
@@ -3268,7 +3245,7 @@
       </p:sp>
       <p:sp>
         <p:nvSpPr>
-          <p:cNvPr id="6" name="Rectangle 5"/>
+          <p:cNvPr id="5" name="Rectangle 4"/>
           <p:cNvSpPr/>
           <p:nvPr/>
         </p:nvSpPr>
@@ -3309,7 +3286,7 @@
       </p:sp>
       <p:sp>
         <p:nvSpPr>
-          <p:cNvPr id="7" name="TextBox 6"/>
+          <p:cNvPr id="6" name="TextBox 5"/>
           <p:cNvSpPr txBox="1"/>
           <p:nvPr/>
         </p:nvSpPr>
@@ -3351,7 +3328,7 @@
       </p:sp>
       <p:sp>
         <p:nvSpPr>
-          <p:cNvPr id="8" name="TextBox 7"/>
+          <p:cNvPr id="7" name="TextBox 6"/>
           <p:cNvSpPr txBox="1"/>
           <p:nvPr/>
         </p:nvSpPr>
@@ -3393,7 +3370,7 @@
       </p:sp>
       <p:sp>
         <p:nvSpPr>
-          <p:cNvPr id="9" name="TextBox 8"/>
+          <p:cNvPr id="8" name="TextBox 7"/>
           <p:cNvSpPr txBox="1"/>
           <p:nvPr/>
         </p:nvSpPr>
@@ -3492,7 +3469,7 @@
       </p:sp>
       <p:sp>
         <p:nvSpPr>
-          <p:cNvPr id="10" name="Rectangle 9"/>
+          <p:cNvPr id="9" name="Rectangle 8"/>
           <p:cNvSpPr/>
           <p:nvPr/>
         </p:nvSpPr>
@@ -3533,7 +3510,7 @@
       </p:sp>
       <p:sp>
         <p:nvSpPr>
-          <p:cNvPr id="11" name="Rectangle 10"/>
+          <p:cNvPr id="10" name="Rectangle 9"/>
           <p:cNvSpPr/>
           <p:nvPr/>
         </p:nvSpPr>
@@ -3574,7 +3551,7 @@
       </p:sp>
       <p:sp>
         <p:nvSpPr>
-          <p:cNvPr id="12" name="Rectangle 11"/>
+          <p:cNvPr id="11" name="Rectangle 10"/>
           <p:cNvSpPr/>
           <p:nvPr/>
         </p:nvSpPr>
@@ -3615,7 +3592,7 @@
       </p:sp>
       <p:sp>
         <p:nvSpPr>
-          <p:cNvPr id="13" name="TextBox 12"/>
+          <p:cNvPr id="12" name="TextBox 11"/>
           <p:cNvSpPr txBox="1"/>
           <p:nvPr/>
         </p:nvSpPr>
@@ -3657,7 +3634,7 @@
       </p:sp>
       <p:sp>
         <p:nvSpPr>
-          <p:cNvPr id="14" name="TextBox 13"/>
+          <p:cNvPr id="13" name="TextBox 12"/>
           <p:cNvSpPr txBox="1"/>
           <p:nvPr/>
         </p:nvSpPr>
@@ -3699,7 +3676,7 @@
       </p:sp>
       <p:sp>
         <p:nvSpPr>
-          <p:cNvPr id="15" name="TextBox 14"/>
+          <p:cNvPr id="14" name="TextBox 13"/>
           <p:cNvSpPr txBox="1"/>
           <p:nvPr/>
         </p:nvSpPr>
@@ -3798,7 +3775,7 @@
       </p:sp>
       <p:sp>
         <p:nvSpPr>
-          <p:cNvPr id="16" name="Rectangle 15"/>
+          <p:cNvPr id="15" name="Rectangle 14"/>
           <p:cNvSpPr/>
           <p:nvPr/>
         </p:nvSpPr>
@@ -3839,7 +3816,7 @@
       </p:sp>
       <p:sp>
         <p:nvSpPr>
-          <p:cNvPr id="17" name="Rectangle 16"/>
+          <p:cNvPr id="16" name="Rectangle 15"/>
           <p:cNvSpPr/>
           <p:nvPr/>
         </p:nvSpPr>
@@ -3880,7 +3857,7 @@
       </p:sp>
       <p:sp>
         <p:nvSpPr>
-          <p:cNvPr id="18" name="Rectangle 17"/>
+          <p:cNvPr id="17" name="Rectangle 16"/>
           <p:cNvSpPr/>
           <p:nvPr/>
         </p:nvSpPr>
@@ -3921,7 +3898,7 @@
       </p:sp>
       <p:sp>
         <p:nvSpPr>
-          <p:cNvPr id="19" name="TextBox 18"/>
+          <p:cNvPr id="18" name="TextBox 17"/>
           <p:cNvSpPr txBox="1"/>
           <p:nvPr/>
         </p:nvSpPr>
@@ -3963,7 +3940,7 @@
       </p:sp>
       <p:sp>
         <p:nvSpPr>
-          <p:cNvPr id="20" name="TextBox 19"/>
+          <p:cNvPr id="19" name="TextBox 18"/>
           <p:cNvSpPr txBox="1"/>
           <p:nvPr/>
         </p:nvSpPr>
@@ -4005,7 +3982,7 @@
       </p:sp>
       <p:sp>
         <p:nvSpPr>
-          <p:cNvPr id="21" name="TextBox 20"/>
+          <p:cNvPr id="20" name="TextBox 19"/>
           <p:cNvSpPr txBox="1"/>
           <p:nvPr/>
         </p:nvSpPr>
@@ -4104,7 +4081,7 @@
       </p:sp>
       <p:sp>
         <p:nvSpPr>
-          <p:cNvPr id="22" name="Rectangle 21"/>
+          <p:cNvPr id="21" name="Rectangle 20"/>
           <p:cNvSpPr/>
           <p:nvPr/>
         </p:nvSpPr>
@@ -4147,7 +4124,7 @@
       </p:sp>
       <p:sp>
         <p:nvSpPr>
-          <p:cNvPr id="23" name="TextBox 22"/>
+          <p:cNvPr id="22" name="TextBox 21"/>
           <p:cNvSpPr txBox="1"/>
           <p:nvPr/>
         </p:nvSpPr>
@@ -4208,7 +4185,7 @@
       </p:sp>
       <p:sp>
         <p:nvSpPr>
-          <p:cNvPr id="24" name="TextBox 23"/>
+          <p:cNvPr id="23" name="TextBox 22"/>
           <p:cNvSpPr txBox="1"/>
           <p:nvPr/>
         </p:nvSpPr>
@@ -4261,9 +4238,12 @@
   <p:cSld>
     <p:bg>
       <p:bgPr>
-        <a:solidFill>
-          <a:srgbClr val="FFFFFF"/>
-        </a:solidFill>
+        <a:blipFill>
+          <a:blip r:embed="rId2"/>
+          <a:stretch>
+            <a:fillRect/>
+          </a:stretch>
+        </a:blipFill>
         <a:effectLst/>
       </p:bgPr>
     </p:bg>
@@ -4274,35 +4254,9 @@
         <p:nvPr/>
       </p:nvGrpSpPr>
       <p:grpSpPr/>
-      <p:pic>
-        <p:nvPicPr>
-          <p:cNvPr id="2" name="Picture 1" descr="bg-p2.png"/>
-          <p:cNvPicPr>
-            <a:picLocks noChangeAspect="1"/>
-          </p:cNvPicPr>
-          <p:nvPr/>
-        </p:nvPicPr>
-        <p:blipFill>
-          <a:blip r:embed="rId2">
-            <a:alphaModFix amt="80000"/>
-          </a:blip>
-          <a:stretch>
-            <a:fillRect/>
-          </a:stretch>
-        </p:blipFill>
-        <p:spPr>
-          <a:xfrm>
-            <a:off x="0" y="0"/>
-            <a:ext cx="7556399" cy="10692000"/>
-          </a:xfrm>
-          <a:prstGeom prst="rect">
-            <a:avLst/>
-          </a:prstGeom>
-        </p:spPr>
-      </p:pic>
-      <p:sp>
-        <p:nvSpPr>
-          <p:cNvPr id="3" name="TextBox 2"/>
+      <p:sp>
+        <p:nvSpPr>
+          <p:cNvPr id="2" name="TextBox 1"/>
           <p:cNvSpPr txBox="1"/>
           <p:nvPr/>
         </p:nvSpPr>
@@ -4363,7 +4317,7 @@
       </p:sp>
       <p:sp>
         <p:nvSpPr>
-          <p:cNvPr id="4" name="Rectangle 3"/>
+          <p:cNvPr id="3" name="Rectangle 2"/>
           <p:cNvSpPr/>
           <p:nvPr/>
         </p:nvSpPr>
@@ -4404,7 +4358,7 @@
       </p:sp>
       <p:sp>
         <p:nvSpPr>
-          <p:cNvPr id="5" name="Rectangle 4"/>
+          <p:cNvPr id="4" name="Rectangle 3"/>
           <p:cNvSpPr/>
           <p:nvPr/>
         </p:nvSpPr>
@@ -4445,7 +4399,7 @@
       </p:sp>
       <p:sp>
         <p:nvSpPr>
-          <p:cNvPr id="6" name="Rectangle 5"/>
+          <p:cNvPr id="5" name="Rectangle 4"/>
           <p:cNvSpPr/>
           <p:nvPr/>
         </p:nvSpPr>
@@ -4486,7 +4440,7 @@
       </p:sp>
       <p:sp>
         <p:nvSpPr>
-          <p:cNvPr id="7" name="TextBox 6"/>
+          <p:cNvPr id="6" name="TextBox 5"/>
           <p:cNvSpPr txBox="1"/>
           <p:nvPr/>
         </p:nvSpPr>
@@ -4528,7 +4482,7 @@
       </p:sp>
       <p:sp>
         <p:nvSpPr>
-          <p:cNvPr id="8" name="TextBox 7"/>
+          <p:cNvPr id="7" name="TextBox 6"/>
           <p:cNvSpPr txBox="1"/>
           <p:nvPr/>
         </p:nvSpPr>
@@ -4570,7 +4524,7 @@
       </p:sp>
       <p:sp>
         <p:nvSpPr>
-          <p:cNvPr id="9" name="TextBox 8"/>
+          <p:cNvPr id="8" name="TextBox 7"/>
           <p:cNvSpPr txBox="1"/>
           <p:nvPr/>
         </p:nvSpPr>
@@ -4669,7 +4623,7 @@
       </p:sp>
       <p:sp>
         <p:nvSpPr>
-          <p:cNvPr id="10" name="Rectangle 9"/>
+          <p:cNvPr id="9" name="Rectangle 8"/>
           <p:cNvSpPr/>
           <p:nvPr/>
         </p:nvSpPr>
@@ -4710,7 +4664,7 @@
       </p:sp>
       <p:sp>
         <p:nvSpPr>
-          <p:cNvPr id="11" name="Rectangle 10"/>
+          <p:cNvPr id="10" name="Rectangle 9"/>
           <p:cNvSpPr/>
           <p:nvPr/>
         </p:nvSpPr>
@@ -4751,7 +4705,7 @@
       </p:sp>
       <p:sp>
         <p:nvSpPr>
-          <p:cNvPr id="12" name="Rectangle 11"/>
+          <p:cNvPr id="11" name="Rectangle 10"/>
           <p:cNvSpPr/>
           <p:nvPr/>
         </p:nvSpPr>
@@ -4792,7 +4746,7 @@
       </p:sp>
       <p:sp>
         <p:nvSpPr>
-          <p:cNvPr id="13" name="TextBox 12"/>
+          <p:cNvPr id="12" name="TextBox 11"/>
           <p:cNvSpPr txBox="1"/>
           <p:nvPr/>
         </p:nvSpPr>
@@ -4834,7 +4788,7 @@
       </p:sp>
       <p:sp>
         <p:nvSpPr>
-          <p:cNvPr id="14" name="TextBox 13"/>
+          <p:cNvPr id="13" name="TextBox 12"/>
           <p:cNvSpPr txBox="1"/>
           <p:nvPr/>
         </p:nvSpPr>
@@ -4876,7 +4830,7 @@
       </p:sp>
       <p:sp>
         <p:nvSpPr>
-          <p:cNvPr id="15" name="TextBox 14"/>
+          <p:cNvPr id="14" name="TextBox 13"/>
           <p:cNvSpPr txBox="1"/>
           <p:nvPr/>
         </p:nvSpPr>
@@ -4975,7 +4929,7 @@
       </p:sp>
       <p:sp>
         <p:nvSpPr>
-          <p:cNvPr id="16" name="Rectangle 15"/>
+          <p:cNvPr id="15" name="Rectangle 14"/>
           <p:cNvSpPr/>
           <p:nvPr/>
         </p:nvSpPr>
@@ -5016,7 +4970,7 @@
       </p:sp>
       <p:sp>
         <p:nvSpPr>
-          <p:cNvPr id="17" name="Rectangle 16"/>
+          <p:cNvPr id="16" name="Rectangle 15"/>
           <p:cNvSpPr/>
           <p:nvPr/>
         </p:nvSpPr>
@@ -5057,7 +5011,7 @@
       </p:sp>
       <p:sp>
         <p:nvSpPr>
-          <p:cNvPr id="18" name="Rectangle 17"/>
+          <p:cNvPr id="17" name="Rectangle 16"/>
           <p:cNvSpPr/>
           <p:nvPr/>
         </p:nvSpPr>
@@ -5098,7 +5052,7 @@
       </p:sp>
       <p:sp>
         <p:nvSpPr>
-          <p:cNvPr id="19" name="TextBox 18"/>
+          <p:cNvPr id="18" name="TextBox 17"/>
           <p:cNvSpPr txBox="1"/>
           <p:nvPr/>
         </p:nvSpPr>
@@ -5140,7 +5094,7 @@
       </p:sp>
       <p:sp>
         <p:nvSpPr>
-          <p:cNvPr id="20" name="TextBox 19"/>
+          <p:cNvPr id="19" name="TextBox 18"/>
           <p:cNvSpPr txBox="1"/>
           <p:nvPr/>
         </p:nvSpPr>
@@ -5182,7 +5136,7 @@
       </p:sp>
       <p:sp>
         <p:nvSpPr>
-          <p:cNvPr id="21" name="TextBox 20"/>
+          <p:cNvPr id="20" name="TextBox 19"/>
           <p:cNvSpPr txBox="1"/>
           <p:nvPr/>
         </p:nvSpPr>
@@ -5281,7 +5235,7 @@
       </p:sp>
       <p:sp>
         <p:nvSpPr>
-          <p:cNvPr id="22" name="Rectangle 21"/>
+          <p:cNvPr id="21" name="Rectangle 20"/>
           <p:cNvSpPr/>
           <p:nvPr/>
         </p:nvSpPr>
@@ -5324,7 +5278,7 @@
       </p:sp>
       <p:sp>
         <p:nvSpPr>
-          <p:cNvPr id="23" name="Rectangle 22"/>
+          <p:cNvPr id="22" name="Rectangle 21"/>
           <p:cNvSpPr/>
           <p:nvPr/>
         </p:nvSpPr>
@@ -5365,7 +5319,7 @@
       </p:sp>
       <p:sp>
         <p:nvSpPr>
-          <p:cNvPr id="24" name="TextBox 23"/>
+          <p:cNvPr id="23" name="TextBox 22"/>
           <p:cNvSpPr txBox="1"/>
           <p:nvPr/>
         </p:nvSpPr>
@@ -5407,7 +5361,7 @@
       </p:sp>
       <p:sp>
         <p:nvSpPr>
-          <p:cNvPr id="25" name="TextBox 24"/>
+          <p:cNvPr id="24" name="TextBox 23"/>
           <p:cNvSpPr txBox="1"/>
           <p:nvPr/>
         </p:nvSpPr>
@@ -5506,7 +5460,7 @@
       </p:sp>
       <p:sp>
         <p:nvSpPr>
-          <p:cNvPr id="26" name="Rectangle 25"/>
+          <p:cNvPr id="25" name="Rectangle 24"/>
           <p:cNvSpPr/>
           <p:nvPr/>
         </p:nvSpPr>
@@ -5549,7 +5503,7 @@
       </p:sp>
       <p:sp>
         <p:nvSpPr>
-          <p:cNvPr id="27" name="Rectangle 26"/>
+          <p:cNvPr id="26" name="Rectangle 25"/>
           <p:cNvSpPr/>
           <p:nvPr/>
         </p:nvSpPr>
@@ -5590,7 +5544,7 @@
       </p:sp>
       <p:sp>
         <p:nvSpPr>
-          <p:cNvPr id="28" name="TextBox 27"/>
+          <p:cNvPr id="27" name="TextBox 26"/>
           <p:cNvSpPr txBox="1"/>
           <p:nvPr/>
         </p:nvSpPr>
@@ -5708,7 +5662,7 @@
       </p:sp>
       <p:sp>
         <p:nvSpPr>
-          <p:cNvPr id="29" name="TextBox 28"/>
+          <p:cNvPr id="28" name="TextBox 27"/>
           <p:cNvSpPr txBox="1"/>
           <p:nvPr/>
         </p:nvSpPr>

--- a/assets/memos/B10-memo.pptx
+++ b/assets/memos/B10-memo.pptx
@@ -5415,7 +5415,7 @@
                 </a:solidFill>
                 <a:latin typeface="Arial"/>
               </a:rPr>
-              <a:t>→ Vous avez maintenant toutes les clés pour utiliser Doctolib sereinement. Voici comment passer à l'action dès la fin de cet atelier :</a:t>
+              <a:t>→ Vous avez maintenant toutes les clés pour utiliser Doctolib sereinement. Voici comment passer à l'action dès_x000B_la fin de cet atelier :</a:t>
             </a:r>
           </a:p>
           <a:p>
